--- a/Project_2_Phishing_Email/fake_mail_project_ppt.pptx
+++ b/Project_2_Phishing_Email/fake_mail_project_ppt.pptx
@@ -3356,7 +3356,12 @@
             <p:ph type="title"/>
           </p:nvPr>
         </p:nvSpPr>
-        <p:spPr/>
+        <p:spPr>
+          <a:xfrm>
+            <a:off x="457201" y="204787"/>
+            <a:ext cx="3008313" cy="871538"/>
+          </a:xfrm>
+        </p:spPr>
         <p:txBody>
           <a:bodyPr/>
           <a:lstStyle/>
@@ -3373,12 +3378,12 @@
       </p:sp>
       <p:sp>
         <p:nvSpPr>
-          <p:cNvPr id="3" name="Content Placeholder 2"/>
-          <p:cNvSpPr>
-            <a:spLocks noGrp="1"/>
-          </p:cNvSpPr>
-          <p:nvPr>
-            <p:ph idx="1"/>
+          <p:cNvPr id="4" name="Text Placeholder 3"/>
+          <p:cNvSpPr>
+            <a:spLocks noGrp="1"/>
+          </p:cNvSpPr>
+          <p:nvPr>
+            <p:ph idx="2" sz="half" type="body"/>
           </p:nvPr>
         </p:nvSpPr>
         <p:spPr/>
@@ -3446,17 +3451,38 @@
               <a:t> Deploying the best model in a web interface.</a:t>
             </a:r>
           </a:p>
-          <a:p>
-            <a:pPr lvl="0" indent="0" marL="0">
-              <a:buNone/>
-            </a:pPr>
-            <a:r>
-              <a:rPr i="1"/>
-              <a:t>(Include the Workflow Diagram from the report here)</a:t>
-            </a:r>
-          </a:p>
-        </p:txBody>
-      </p:sp>
+        </p:txBody>
+      </p:sp>
+      <p:pic>
+        <p:nvPicPr>
+          <p:cNvPr descr="./workflow_diagram.png" id="0" name="Picture 1"/>
+          <p:cNvPicPr>
+            <a:picLocks noGrp="1" noChangeAspect="1"/>
+          </p:cNvPicPr>
+          <p:nvPr/>
+        </p:nvPicPr>
+        <p:blipFill>
+          <a:blip r:embed="rId2"/>
+          <a:stretch>
+            <a:fillRect/>
+          </a:stretch>
+        </p:blipFill>
+        <p:spPr bwMode="auto">
+          <a:xfrm>
+            <a:off x="3568700" y="863600"/>
+            <a:ext cx="5105400" cy="3060700"/>
+          </a:xfrm>
+          <a:prstGeom prst="rect">
+            <a:avLst/>
+          </a:prstGeom>
+          <a:noFill/>
+          <a:ln w="9525">
+            <a:noFill/>
+            <a:headEnd/>
+            <a:tailEnd/>
+          </a:ln>
+        </p:spPr>
+      </p:pic>
     </p:spTree>
   </p:cSld>
 </p:sld>
